--- a/3. Modulo didáctico-Obj3.pptx
+++ b/3. Modulo didáctico-Obj3.pptx
@@ -1867,7 +1867,7 @@
                 <a:ea typeface="Segoe UI" pitchFamily="34" charset="-122"/>
                 <a:cs typeface="Segoe UI" pitchFamily="34" charset="-120"/>
               </a:rPr>
-              <a:t>Módulo didáctico: ruta guiada para reproducir la simulación, validación y modelado predictivo de inventarios en </a:t>
+              <a:t>Módulo didáctico: Ruta guiada para reproducir la simulación, validación y modelado predictivo de inventarios en </a:t>
             </a:r>
             <a:r>
               <a:rPr lang="es-CO" sz="2550" noProof="0" dirty="0" err="1">
